--- a/CSE-403_Software_Engineering_and_Information_System_Design/2nd Tutorial/SE_Slides/Lec3fn_Agile SW Dev.pptx
+++ b/CSE-403_Software_Engineering_and_Information_System_Design/2nd Tutorial/SE_Slides/Lec3fn_Agile SW Dev.pptx
@@ -41,30 +41,23 @@
   <p:notesSz cx="6858000" cy="9144000"/>
   <p:embeddedFontLst>
     <p:embeddedFont>
-      <p:font typeface="Helvetica Neue" charset="0"/>
+      <p:font typeface="Calibri" panose="020F0502020204030204" pitchFamily="34" charset="0"/>
       <p:regular r:id="rId31"/>
       <p:bold r:id="rId32"/>
       <p:italic r:id="rId33"/>
       <p:boldItalic r:id="rId34"/>
     </p:embeddedFont>
     <p:embeddedFont>
-      <p:font typeface="Calibri Light" pitchFamily="34" charset="0"/>
+      <p:font typeface="Calibri Light" panose="020F0302020204030204" pitchFamily="34" charset="0"/>
       <p:regular r:id="rId35"/>
       <p:italic r:id="rId36"/>
     </p:embeddedFont>
     <p:embeddedFont>
-      <p:font typeface="Helvetica" pitchFamily="34" charset="0"/>
+      <p:font typeface="Helvetica Neue" panose="02000503000000020004" pitchFamily="2" charset="0"/>
       <p:regular r:id="rId37"/>
       <p:bold r:id="rId38"/>
       <p:italic r:id="rId39"/>
       <p:boldItalic r:id="rId40"/>
-    </p:embeddedFont>
-    <p:embeddedFont>
-      <p:font typeface="Calibri" pitchFamily="34" charset="0"/>
-      <p:regular r:id="rId41"/>
-      <p:bold r:id="rId42"/>
-      <p:italic r:id="rId43"/>
-      <p:boldItalic r:id="rId44"/>
     </p:embeddedFont>
   </p:embeddedFontLst>
   <p:defaultTextStyle>
@@ -164,7 +157,7 @@
   </p:defaultTextStyle>
   <p:extLst>
     <p:ext uri="{EFAFB233-063F-42B5-8137-9DF3F51BA10A}">
-      <p15:sldGuideLst xmlns:p15="http://schemas.microsoft.com/office/powerpoint/2012/main" xmlns="">
+      <p15:sldGuideLst xmlns:p15="http://schemas.microsoft.com/office/powerpoint/2012/main">
         <p15:guide id="1" orient="horz" pos="2160">
           <p15:clr>
             <a:srgbClr val="A4A3A4"/>
@@ -3908,7 +3901,7 @@
           <p:cNvPr id="2" name="Title 1">
             <a:extLst>
               <a:ext uri="{FF2B5EF4-FFF2-40B4-BE49-F238E27FC236}">
-                <a16:creationId xmlns:a16="http://schemas.microsoft.com/office/drawing/2014/main" xmlns="" id="{2C07114C-BD26-FD6A-4A87-AD64D8EB48BD}"/>
+                <a16:creationId xmlns:a16="http://schemas.microsoft.com/office/drawing/2014/main" id="{2C07114C-BD26-FD6A-4A87-AD64D8EB48BD}"/>
               </a:ext>
             </a:extLst>
           </p:cNvPr>
@@ -3945,7 +3938,7 @@
           <p:cNvPr id="3" name="Subtitle 2">
             <a:extLst>
               <a:ext uri="{FF2B5EF4-FFF2-40B4-BE49-F238E27FC236}">
-                <a16:creationId xmlns:a16="http://schemas.microsoft.com/office/drawing/2014/main" xmlns="" id="{D3449799-0836-C33D-D02C-14D71A5ED950}"/>
+                <a16:creationId xmlns:a16="http://schemas.microsoft.com/office/drawing/2014/main" id="{D3449799-0836-C33D-D02C-14D71A5ED950}"/>
               </a:ext>
             </a:extLst>
           </p:cNvPr>
@@ -4015,7 +4008,7 @@
           <p:cNvPr id="4" name="Date Placeholder 3">
             <a:extLst>
               <a:ext uri="{FF2B5EF4-FFF2-40B4-BE49-F238E27FC236}">
-                <a16:creationId xmlns:a16="http://schemas.microsoft.com/office/drawing/2014/main" xmlns="" id="{AE31EBA9-A522-8524-5AAA-37C03F6B5551}"/>
+                <a16:creationId xmlns:a16="http://schemas.microsoft.com/office/drawing/2014/main" id="{AE31EBA9-A522-8524-5AAA-37C03F6B5551}"/>
               </a:ext>
             </a:extLst>
           </p:cNvPr>
@@ -4033,7 +4026,7 @@
           <a:p>
             <a:fld id="{230CBE3B-F631-459A-AA80-995C740CD196}" type="datetimeFigureOut">
               <a:rPr lang="en-US" smtClean="0"/>
-              <a:t>3/5/2025</a:t>
+              <a:t>8/22/25</a:t>
             </a:fld>
             <a:endParaRPr lang="en-US"/>
           </a:p>
@@ -4044,7 +4037,7 @@
           <p:cNvPr id="5" name="Footer Placeholder 4">
             <a:extLst>
               <a:ext uri="{FF2B5EF4-FFF2-40B4-BE49-F238E27FC236}">
-                <a16:creationId xmlns:a16="http://schemas.microsoft.com/office/drawing/2014/main" xmlns="" id="{4DD0ACC1-F90E-CA4B-0357-F637B5153D3D}"/>
+                <a16:creationId xmlns:a16="http://schemas.microsoft.com/office/drawing/2014/main" id="{4DD0ACC1-F90E-CA4B-0357-F637B5153D3D}"/>
               </a:ext>
             </a:extLst>
           </p:cNvPr>
@@ -4069,7 +4062,7 @@
           <p:cNvPr id="6" name="Slide Number Placeholder 5">
             <a:extLst>
               <a:ext uri="{FF2B5EF4-FFF2-40B4-BE49-F238E27FC236}">
-                <a16:creationId xmlns:a16="http://schemas.microsoft.com/office/drawing/2014/main" xmlns="" id="{8BE3D26F-7212-214A-58D0-E13AC51696B8}"/>
+                <a16:creationId xmlns:a16="http://schemas.microsoft.com/office/drawing/2014/main" id="{8BE3D26F-7212-214A-58D0-E13AC51696B8}"/>
               </a:ext>
             </a:extLst>
           </p:cNvPr>
@@ -4138,7 +4131,7 @@
           <p:cNvPr id="2" name="Title 1">
             <a:extLst>
               <a:ext uri="{FF2B5EF4-FFF2-40B4-BE49-F238E27FC236}">
-                <a16:creationId xmlns:a16="http://schemas.microsoft.com/office/drawing/2014/main" xmlns="" id="{37865358-75FC-673F-C345-784F771B0623}"/>
+                <a16:creationId xmlns:a16="http://schemas.microsoft.com/office/drawing/2014/main" id="{37865358-75FC-673F-C345-784F771B0623}"/>
               </a:ext>
             </a:extLst>
           </p:cNvPr>
@@ -4166,7 +4159,7 @@
           <p:cNvPr id="3" name="Vertical Text Placeholder 2">
             <a:extLst>
               <a:ext uri="{FF2B5EF4-FFF2-40B4-BE49-F238E27FC236}">
-                <a16:creationId xmlns:a16="http://schemas.microsoft.com/office/drawing/2014/main" xmlns="" id="{A8409748-CE39-01F1-449B-E4124217983B}"/>
+                <a16:creationId xmlns:a16="http://schemas.microsoft.com/office/drawing/2014/main" id="{A8409748-CE39-01F1-449B-E4124217983B}"/>
               </a:ext>
             </a:extLst>
           </p:cNvPr>
@@ -4223,7 +4216,7 @@
           <p:cNvPr id="4" name="Date Placeholder 3">
             <a:extLst>
               <a:ext uri="{FF2B5EF4-FFF2-40B4-BE49-F238E27FC236}">
-                <a16:creationId xmlns:a16="http://schemas.microsoft.com/office/drawing/2014/main" xmlns="" id="{C107FAD8-87BE-F235-9A51-E929C08BDB74}"/>
+                <a16:creationId xmlns:a16="http://schemas.microsoft.com/office/drawing/2014/main" id="{C107FAD8-87BE-F235-9A51-E929C08BDB74}"/>
               </a:ext>
             </a:extLst>
           </p:cNvPr>
@@ -4241,7 +4234,7 @@
           <a:p>
             <a:fld id="{230CBE3B-F631-459A-AA80-995C740CD196}" type="datetimeFigureOut">
               <a:rPr lang="en-US" smtClean="0"/>
-              <a:t>3/5/2025</a:t>
+              <a:t>8/22/25</a:t>
             </a:fld>
             <a:endParaRPr lang="en-US"/>
           </a:p>
@@ -4252,7 +4245,7 @@
           <p:cNvPr id="5" name="Footer Placeholder 4">
             <a:extLst>
               <a:ext uri="{FF2B5EF4-FFF2-40B4-BE49-F238E27FC236}">
-                <a16:creationId xmlns:a16="http://schemas.microsoft.com/office/drawing/2014/main" xmlns="" id="{F5485A87-C12D-10F0-29A4-D82010E11F37}"/>
+                <a16:creationId xmlns:a16="http://schemas.microsoft.com/office/drawing/2014/main" id="{F5485A87-C12D-10F0-29A4-D82010E11F37}"/>
               </a:ext>
             </a:extLst>
           </p:cNvPr>
@@ -4277,7 +4270,7 @@
           <p:cNvPr id="6" name="Slide Number Placeholder 5">
             <a:extLst>
               <a:ext uri="{FF2B5EF4-FFF2-40B4-BE49-F238E27FC236}">
-                <a16:creationId xmlns:a16="http://schemas.microsoft.com/office/drawing/2014/main" xmlns="" id="{120183F3-EE08-6B5D-7E0E-2872126DF837}"/>
+                <a16:creationId xmlns:a16="http://schemas.microsoft.com/office/drawing/2014/main" id="{120183F3-EE08-6B5D-7E0E-2872126DF837}"/>
               </a:ext>
             </a:extLst>
           </p:cNvPr>
@@ -4348,7 +4341,7 @@
           <p:cNvPr id="2" name="Vertical Title 1">
             <a:extLst>
               <a:ext uri="{FF2B5EF4-FFF2-40B4-BE49-F238E27FC236}">
-                <a16:creationId xmlns:a16="http://schemas.microsoft.com/office/drawing/2014/main" xmlns="" id="{1B98C9BF-4331-AFDA-06B0-8E5ACD8FB0F1}"/>
+                <a16:creationId xmlns:a16="http://schemas.microsoft.com/office/drawing/2014/main" id="{1B98C9BF-4331-AFDA-06B0-8E5ACD8FB0F1}"/>
               </a:ext>
             </a:extLst>
           </p:cNvPr>
@@ -4381,7 +4374,7 @@
           <p:cNvPr id="3" name="Vertical Text Placeholder 2">
             <a:extLst>
               <a:ext uri="{FF2B5EF4-FFF2-40B4-BE49-F238E27FC236}">
-                <a16:creationId xmlns:a16="http://schemas.microsoft.com/office/drawing/2014/main" xmlns="" id="{18E6786F-B288-EF26-77B0-D4D9479D7D98}"/>
+                <a16:creationId xmlns:a16="http://schemas.microsoft.com/office/drawing/2014/main" id="{18E6786F-B288-EF26-77B0-D4D9479D7D98}"/>
               </a:ext>
             </a:extLst>
           </p:cNvPr>
@@ -4443,7 +4436,7 @@
           <p:cNvPr id="4" name="Date Placeholder 3">
             <a:extLst>
               <a:ext uri="{FF2B5EF4-FFF2-40B4-BE49-F238E27FC236}">
-                <a16:creationId xmlns:a16="http://schemas.microsoft.com/office/drawing/2014/main" xmlns="" id="{BB048BC8-F2E1-F486-87F0-A82EC0885378}"/>
+                <a16:creationId xmlns:a16="http://schemas.microsoft.com/office/drawing/2014/main" id="{BB048BC8-F2E1-F486-87F0-A82EC0885378}"/>
               </a:ext>
             </a:extLst>
           </p:cNvPr>
@@ -4461,7 +4454,7 @@
           <a:p>
             <a:fld id="{230CBE3B-F631-459A-AA80-995C740CD196}" type="datetimeFigureOut">
               <a:rPr lang="en-US" smtClean="0"/>
-              <a:t>3/5/2025</a:t>
+              <a:t>8/22/25</a:t>
             </a:fld>
             <a:endParaRPr lang="en-US"/>
           </a:p>
@@ -4472,7 +4465,7 @@
           <p:cNvPr id="5" name="Footer Placeholder 4">
             <a:extLst>
               <a:ext uri="{FF2B5EF4-FFF2-40B4-BE49-F238E27FC236}">
-                <a16:creationId xmlns:a16="http://schemas.microsoft.com/office/drawing/2014/main" xmlns="" id="{AE064E1F-B9A3-C4D9-8B3B-6B242810180A}"/>
+                <a16:creationId xmlns:a16="http://schemas.microsoft.com/office/drawing/2014/main" id="{AE064E1F-B9A3-C4D9-8B3B-6B242810180A}"/>
               </a:ext>
             </a:extLst>
           </p:cNvPr>
@@ -4497,7 +4490,7 @@
           <p:cNvPr id="6" name="Slide Number Placeholder 5">
             <a:extLst>
               <a:ext uri="{FF2B5EF4-FFF2-40B4-BE49-F238E27FC236}">
-                <a16:creationId xmlns:a16="http://schemas.microsoft.com/office/drawing/2014/main" xmlns="" id="{F8B312BD-F3D4-0691-F8C0-65B92B4BC8B1}"/>
+                <a16:creationId xmlns:a16="http://schemas.microsoft.com/office/drawing/2014/main" id="{F8B312BD-F3D4-0691-F8C0-65B92B4BC8B1}"/>
               </a:ext>
             </a:extLst>
           </p:cNvPr>
@@ -4568,7 +4561,7 @@
           <p:cNvPr id="2" name="Title 1">
             <a:extLst>
               <a:ext uri="{FF2B5EF4-FFF2-40B4-BE49-F238E27FC236}">
-                <a16:creationId xmlns:a16="http://schemas.microsoft.com/office/drawing/2014/main" xmlns="" id="{FFC2BC3B-6E19-EE4A-289C-2742FB60571D}"/>
+                <a16:creationId xmlns:a16="http://schemas.microsoft.com/office/drawing/2014/main" id="{FFC2BC3B-6E19-EE4A-289C-2742FB60571D}"/>
               </a:ext>
             </a:extLst>
           </p:cNvPr>
@@ -4596,7 +4589,7 @@
           <p:cNvPr id="3" name="Content Placeholder 2">
             <a:extLst>
               <a:ext uri="{FF2B5EF4-FFF2-40B4-BE49-F238E27FC236}">
-                <a16:creationId xmlns:a16="http://schemas.microsoft.com/office/drawing/2014/main" xmlns="" id="{AB220284-D545-C01D-4254-30606D132FE5}"/>
+                <a16:creationId xmlns:a16="http://schemas.microsoft.com/office/drawing/2014/main" id="{AB220284-D545-C01D-4254-30606D132FE5}"/>
               </a:ext>
             </a:extLst>
           </p:cNvPr>
@@ -4653,7 +4646,7 @@
           <p:cNvPr id="4" name="Date Placeholder 3">
             <a:extLst>
               <a:ext uri="{FF2B5EF4-FFF2-40B4-BE49-F238E27FC236}">
-                <a16:creationId xmlns:a16="http://schemas.microsoft.com/office/drawing/2014/main" xmlns="" id="{0F8D47D3-CE1D-DE29-1BF9-F36F5BD23231}"/>
+                <a16:creationId xmlns:a16="http://schemas.microsoft.com/office/drawing/2014/main" id="{0F8D47D3-CE1D-DE29-1BF9-F36F5BD23231}"/>
               </a:ext>
             </a:extLst>
           </p:cNvPr>
@@ -4671,7 +4664,7 @@
           <a:p>
             <a:fld id="{230CBE3B-F631-459A-AA80-995C740CD196}" type="datetimeFigureOut">
               <a:rPr lang="en-US" smtClean="0"/>
-              <a:t>3/5/2025</a:t>
+              <a:t>8/22/25</a:t>
             </a:fld>
             <a:endParaRPr lang="en-US"/>
           </a:p>
@@ -4682,7 +4675,7 @@
           <p:cNvPr id="5" name="Footer Placeholder 4">
             <a:extLst>
               <a:ext uri="{FF2B5EF4-FFF2-40B4-BE49-F238E27FC236}">
-                <a16:creationId xmlns:a16="http://schemas.microsoft.com/office/drawing/2014/main" xmlns="" id="{DCC4405A-F1E4-2B34-FE04-5B23B636B5C6}"/>
+                <a16:creationId xmlns:a16="http://schemas.microsoft.com/office/drawing/2014/main" id="{DCC4405A-F1E4-2B34-FE04-5B23B636B5C6}"/>
               </a:ext>
             </a:extLst>
           </p:cNvPr>
@@ -4707,7 +4700,7 @@
           <p:cNvPr id="6" name="Slide Number Placeholder 5">
             <a:extLst>
               <a:ext uri="{FF2B5EF4-FFF2-40B4-BE49-F238E27FC236}">
-                <a16:creationId xmlns:a16="http://schemas.microsoft.com/office/drawing/2014/main" xmlns="" id="{51B52367-F68C-003B-55DA-2028E7AFD4B8}"/>
+                <a16:creationId xmlns:a16="http://schemas.microsoft.com/office/drawing/2014/main" id="{51B52367-F68C-003B-55DA-2028E7AFD4B8}"/>
               </a:ext>
             </a:extLst>
           </p:cNvPr>
@@ -4778,7 +4771,7 @@
           <p:cNvPr id="2" name="Title 1">
             <a:extLst>
               <a:ext uri="{FF2B5EF4-FFF2-40B4-BE49-F238E27FC236}">
-                <a16:creationId xmlns:a16="http://schemas.microsoft.com/office/drawing/2014/main" xmlns="" id="{57288FA1-660A-184E-4726-1C9B1F1E677F}"/>
+                <a16:creationId xmlns:a16="http://schemas.microsoft.com/office/drawing/2014/main" id="{57288FA1-660A-184E-4726-1C9B1F1E677F}"/>
               </a:ext>
             </a:extLst>
           </p:cNvPr>
@@ -4815,7 +4808,7 @@
           <p:cNvPr id="3" name="Text Placeholder 2">
             <a:extLst>
               <a:ext uri="{FF2B5EF4-FFF2-40B4-BE49-F238E27FC236}">
-                <a16:creationId xmlns:a16="http://schemas.microsoft.com/office/drawing/2014/main" xmlns="" id="{864C4918-5A79-8FB2-DE79-7CEB43B6870C}"/>
+                <a16:creationId xmlns:a16="http://schemas.microsoft.com/office/drawing/2014/main" id="{864C4918-5A79-8FB2-DE79-7CEB43B6870C}"/>
               </a:ext>
             </a:extLst>
           </p:cNvPr>
@@ -4940,7 +4933,7 @@
           <p:cNvPr id="4" name="Date Placeholder 3">
             <a:extLst>
               <a:ext uri="{FF2B5EF4-FFF2-40B4-BE49-F238E27FC236}">
-                <a16:creationId xmlns:a16="http://schemas.microsoft.com/office/drawing/2014/main" xmlns="" id="{66621A13-7B48-C342-7557-40733CEA67D6}"/>
+                <a16:creationId xmlns:a16="http://schemas.microsoft.com/office/drawing/2014/main" id="{66621A13-7B48-C342-7557-40733CEA67D6}"/>
               </a:ext>
             </a:extLst>
           </p:cNvPr>
@@ -4958,7 +4951,7 @@
           <a:p>
             <a:fld id="{230CBE3B-F631-459A-AA80-995C740CD196}" type="datetimeFigureOut">
               <a:rPr lang="en-US" smtClean="0"/>
-              <a:t>3/5/2025</a:t>
+              <a:t>8/22/25</a:t>
             </a:fld>
             <a:endParaRPr lang="en-US"/>
           </a:p>
@@ -4969,7 +4962,7 @@
           <p:cNvPr id="5" name="Footer Placeholder 4">
             <a:extLst>
               <a:ext uri="{FF2B5EF4-FFF2-40B4-BE49-F238E27FC236}">
-                <a16:creationId xmlns:a16="http://schemas.microsoft.com/office/drawing/2014/main" xmlns="" id="{67274246-38C9-AB63-F071-D4E244ED12C3}"/>
+                <a16:creationId xmlns:a16="http://schemas.microsoft.com/office/drawing/2014/main" id="{67274246-38C9-AB63-F071-D4E244ED12C3}"/>
               </a:ext>
             </a:extLst>
           </p:cNvPr>
@@ -4994,7 +4987,7 @@
           <p:cNvPr id="6" name="Slide Number Placeholder 5">
             <a:extLst>
               <a:ext uri="{FF2B5EF4-FFF2-40B4-BE49-F238E27FC236}">
-                <a16:creationId xmlns:a16="http://schemas.microsoft.com/office/drawing/2014/main" xmlns="" id="{9FA79617-0F2B-BF3B-7840-89B551AD2E54}"/>
+                <a16:creationId xmlns:a16="http://schemas.microsoft.com/office/drawing/2014/main" id="{9FA79617-0F2B-BF3B-7840-89B551AD2E54}"/>
               </a:ext>
             </a:extLst>
           </p:cNvPr>
@@ -5065,7 +5058,7 @@
           <p:cNvPr id="2" name="Title 1">
             <a:extLst>
               <a:ext uri="{FF2B5EF4-FFF2-40B4-BE49-F238E27FC236}">
-                <a16:creationId xmlns:a16="http://schemas.microsoft.com/office/drawing/2014/main" xmlns="" id="{91C32638-F7D7-4157-A017-CB7A755C92C2}"/>
+                <a16:creationId xmlns:a16="http://schemas.microsoft.com/office/drawing/2014/main" id="{91C32638-F7D7-4157-A017-CB7A755C92C2}"/>
               </a:ext>
             </a:extLst>
           </p:cNvPr>
@@ -5093,7 +5086,7 @@
           <p:cNvPr id="3" name="Content Placeholder 2">
             <a:extLst>
               <a:ext uri="{FF2B5EF4-FFF2-40B4-BE49-F238E27FC236}">
-                <a16:creationId xmlns:a16="http://schemas.microsoft.com/office/drawing/2014/main" xmlns="" id="{E9BA9741-E342-AC92-B2CC-949E3CAA2F85}"/>
+                <a16:creationId xmlns:a16="http://schemas.microsoft.com/office/drawing/2014/main" id="{E9BA9741-E342-AC92-B2CC-949E3CAA2F85}"/>
               </a:ext>
             </a:extLst>
           </p:cNvPr>
@@ -5155,7 +5148,7 @@
           <p:cNvPr id="4" name="Content Placeholder 3">
             <a:extLst>
               <a:ext uri="{FF2B5EF4-FFF2-40B4-BE49-F238E27FC236}">
-                <a16:creationId xmlns:a16="http://schemas.microsoft.com/office/drawing/2014/main" xmlns="" id="{5043482A-E666-EA8F-D663-D66C8AAFC8DE}"/>
+                <a16:creationId xmlns:a16="http://schemas.microsoft.com/office/drawing/2014/main" id="{5043482A-E666-EA8F-D663-D66C8AAFC8DE}"/>
               </a:ext>
             </a:extLst>
           </p:cNvPr>
@@ -5217,7 +5210,7 @@
           <p:cNvPr id="5" name="Date Placeholder 4">
             <a:extLst>
               <a:ext uri="{FF2B5EF4-FFF2-40B4-BE49-F238E27FC236}">
-                <a16:creationId xmlns:a16="http://schemas.microsoft.com/office/drawing/2014/main" xmlns="" id="{B584ED4B-ACAA-930F-AB12-DFC0AC10F48D}"/>
+                <a16:creationId xmlns:a16="http://schemas.microsoft.com/office/drawing/2014/main" id="{B584ED4B-ACAA-930F-AB12-DFC0AC10F48D}"/>
               </a:ext>
             </a:extLst>
           </p:cNvPr>
@@ -5235,7 +5228,7 @@
           <a:p>
             <a:fld id="{230CBE3B-F631-459A-AA80-995C740CD196}" type="datetimeFigureOut">
               <a:rPr lang="en-US" smtClean="0"/>
-              <a:t>3/5/2025</a:t>
+              <a:t>8/22/25</a:t>
             </a:fld>
             <a:endParaRPr lang="en-US"/>
           </a:p>
@@ -5246,7 +5239,7 @@
           <p:cNvPr id="6" name="Footer Placeholder 5">
             <a:extLst>
               <a:ext uri="{FF2B5EF4-FFF2-40B4-BE49-F238E27FC236}">
-                <a16:creationId xmlns:a16="http://schemas.microsoft.com/office/drawing/2014/main" xmlns="" id="{18C61FC0-C6F3-D09F-199F-ED0AAF5E2CED}"/>
+                <a16:creationId xmlns:a16="http://schemas.microsoft.com/office/drawing/2014/main" id="{18C61FC0-C6F3-D09F-199F-ED0AAF5E2CED}"/>
               </a:ext>
             </a:extLst>
           </p:cNvPr>
@@ -5271,7 +5264,7 @@
           <p:cNvPr id="7" name="Slide Number Placeholder 6">
             <a:extLst>
               <a:ext uri="{FF2B5EF4-FFF2-40B4-BE49-F238E27FC236}">
-                <a16:creationId xmlns:a16="http://schemas.microsoft.com/office/drawing/2014/main" xmlns="" id="{C643B164-FA00-DC71-ED75-D14558059409}"/>
+                <a16:creationId xmlns:a16="http://schemas.microsoft.com/office/drawing/2014/main" id="{C643B164-FA00-DC71-ED75-D14558059409}"/>
               </a:ext>
             </a:extLst>
           </p:cNvPr>
@@ -5342,7 +5335,7 @@
           <p:cNvPr id="2" name="Title 1">
             <a:extLst>
               <a:ext uri="{FF2B5EF4-FFF2-40B4-BE49-F238E27FC236}">
-                <a16:creationId xmlns:a16="http://schemas.microsoft.com/office/drawing/2014/main" xmlns="" id="{CF533C1F-1475-CD22-6DF9-D9CAB5543DEA}"/>
+                <a16:creationId xmlns:a16="http://schemas.microsoft.com/office/drawing/2014/main" id="{CF533C1F-1475-CD22-6DF9-D9CAB5543DEA}"/>
               </a:ext>
             </a:extLst>
           </p:cNvPr>
@@ -5375,7 +5368,7 @@
           <p:cNvPr id="3" name="Text Placeholder 2">
             <a:extLst>
               <a:ext uri="{FF2B5EF4-FFF2-40B4-BE49-F238E27FC236}">
-                <a16:creationId xmlns:a16="http://schemas.microsoft.com/office/drawing/2014/main" xmlns="" id="{62C643B6-723E-6E10-7224-95555A1E9042}"/>
+                <a16:creationId xmlns:a16="http://schemas.microsoft.com/office/drawing/2014/main" id="{62C643B6-723E-6E10-7224-95555A1E9042}"/>
               </a:ext>
             </a:extLst>
           </p:cNvPr>
@@ -5446,7 +5439,7 @@
           <p:cNvPr id="4" name="Content Placeholder 3">
             <a:extLst>
               <a:ext uri="{FF2B5EF4-FFF2-40B4-BE49-F238E27FC236}">
-                <a16:creationId xmlns:a16="http://schemas.microsoft.com/office/drawing/2014/main" xmlns="" id="{4B1B4833-8BDA-0EAF-C910-D8A1B2B263A1}"/>
+                <a16:creationId xmlns:a16="http://schemas.microsoft.com/office/drawing/2014/main" id="{4B1B4833-8BDA-0EAF-C910-D8A1B2B263A1}"/>
               </a:ext>
             </a:extLst>
           </p:cNvPr>
@@ -5508,7 +5501,7 @@
           <p:cNvPr id="5" name="Text Placeholder 4">
             <a:extLst>
               <a:ext uri="{FF2B5EF4-FFF2-40B4-BE49-F238E27FC236}">
-                <a16:creationId xmlns:a16="http://schemas.microsoft.com/office/drawing/2014/main" xmlns="" id="{F929F639-F892-4094-78E9-BE1BA7886026}"/>
+                <a16:creationId xmlns:a16="http://schemas.microsoft.com/office/drawing/2014/main" id="{F929F639-F892-4094-78E9-BE1BA7886026}"/>
               </a:ext>
             </a:extLst>
           </p:cNvPr>
@@ -5579,7 +5572,7 @@
           <p:cNvPr id="6" name="Content Placeholder 5">
             <a:extLst>
               <a:ext uri="{FF2B5EF4-FFF2-40B4-BE49-F238E27FC236}">
-                <a16:creationId xmlns:a16="http://schemas.microsoft.com/office/drawing/2014/main" xmlns="" id="{E5026F81-A5E5-EF2B-45A4-C5FAD5F7E209}"/>
+                <a16:creationId xmlns:a16="http://schemas.microsoft.com/office/drawing/2014/main" id="{E5026F81-A5E5-EF2B-45A4-C5FAD5F7E209}"/>
               </a:ext>
             </a:extLst>
           </p:cNvPr>
@@ -5641,7 +5634,7 @@
           <p:cNvPr id="7" name="Date Placeholder 6">
             <a:extLst>
               <a:ext uri="{FF2B5EF4-FFF2-40B4-BE49-F238E27FC236}">
-                <a16:creationId xmlns:a16="http://schemas.microsoft.com/office/drawing/2014/main" xmlns="" id="{C87C34FE-F82F-5FAD-1535-1F553C7DAC04}"/>
+                <a16:creationId xmlns:a16="http://schemas.microsoft.com/office/drawing/2014/main" id="{C87C34FE-F82F-5FAD-1535-1F553C7DAC04}"/>
               </a:ext>
             </a:extLst>
           </p:cNvPr>
@@ -5659,7 +5652,7 @@
           <a:p>
             <a:fld id="{230CBE3B-F631-459A-AA80-995C740CD196}" type="datetimeFigureOut">
               <a:rPr lang="en-US" smtClean="0"/>
-              <a:t>3/5/2025</a:t>
+              <a:t>8/22/25</a:t>
             </a:fld>
             <a:endParaRPr lang="en-US"/>
           </a:p>
@@ -5670,7 +5663,7 @@
           <p:cNvPr id="8" name="Footer Placeholder 7">
             <a:extLst>
               <a:ext uri="{FF2B5EF4-FFF2-40B4-BE49-F238E27FC236}">
-                <a16:creationId xmlns:a16="http://schemas.microsoft.com/office/drawing/2014/main" xmlns="" id="{017E0501-CEEA-ECCC-0DA9-8E8E4CD0EB99}"/>
+                <a16:creationId xmlns:a16="http://schemas.microsoft.com/office/drawing/2014/main" id="{017E0501-CEEA-ECCC-0DA9-8E8E4CD0EB99}"/>
               </a:ext>
             </a:extLst>
           </p:cNvPr>
@@ -5695,7 +5688,7 @@
           <p:cNvPr id="9" name="Slide Number Placeholder 8">
             <a:extLst>
               <a:ext uri="{FF2B5EF4-FFF2-40B4-BE49-F238E27FC236}">
-                <a16:creationId xmlns:a16="http://schemas.microsoft.com/office/drawing/2014/main" xmlns="" id="{05A7CA33-3884-11E0-A423-EC77C1F8EC93}"/>
+                <a16:creationId xmlns:a16="http://schemas.microsoft.com/office/drawing/2014/main" id="{05A7CA33-3884-11E0-A423-EC77C1F8EC93}"/>
               </a:ext>
             </a:extLst>
           </p:cNvPr>
@@ -5766,7 +5759,7 @@
           <p:cNvPr id="2" name="Title 1">
             <a:extLst>
               <a:ext uri="{FF2B5EF4-FFF2-40B4-BE49-F238E27FC236}">
-                <a16:creationId xmlns:a16="http://schemas.microsoft.com/office/drawing/2014/main" xmlns="" id="{8E5F8FFE-18C2-C3F4-A9AD-8DED1D7BA401}"/>
+                <a16:creationId xmlns:a16="http://schemas.microsoft.com/office/drawing/2014/main" id="{8E5F8FFE-18C2-C3F4-A9AD-8DED1D7BA401}"/>
               </a:ext>
             </a:extLst>
           </p:cNvPr>
@@ -5794,7 +5787,7 @@
           <p:cNvPr id="3" name="Date Placeholder 2">
             <a:extLst>
               <a:ext uri="{FF2B5EF4-FFF2-40B4-BE49-F238E27FC236}">
-                <a16:creationId xmlns:a16="http://schemas.microsoft.com/office/drawing/2014/main" xmlns="" id="{D4FD78FF-4BC1-B0FD-11C7-5F48B992B8AA}"/>
+                <a16:creationId xmlns:a16="http://schemas.microsoft.com/office/drawing/2014/main" id="{D4FD78FF-4BC1-B0FD-11C7-5F48B992B8AA}"/>
               </a:ext>
             </a:extLst>
           </p:cNvPr>
@@ -5812,7 +5805,7 @@
           <a:p>
             <a:fld id="{230CBE3B-F631-459A-AA80-995C740CD196}" type="datetimeFigureOut">
               <a:rPr lang="en-US" smtClean="0"/>
-              <a:t>3/5/2025</a:t>
+              <a:t>8/22/25</a:t>
             </a:fld>
             <a:endParaRPr lang="en-US"/>
           </a:p>
@@ -5823,7 +5816,7 @@
           <p:cNvPr id="4" name="Footer Placeholder 3">
             <a:extLst>
               <a:ext uri="{FF2B5EF4-FFF2-40B4-BE49-F238E27FC236}">
-                <a16:creationId xmlns:a16="http://schemas.microsoft.com/office/drawing/2014/main" xmlns="" id="{7788EFE6-CE43-D7B8-8C97-0862AB94891B}"/>
+                <a16:creationId xmlns:a16="http://schemas.microsoft.com/office/drawing/2014/main" id="{7788EFE6-CE43-D7B8-8C97-0862AB94891B}"/>
               </a:ext>
             </a:extLst>
           </p:cNvPr>
@@ -5848,7 +5841,7 @@
           <p:cNvPr id="5" name="Slide Number Placeholder 4">
             <a:extLst>
               <a:ext uri="{FF2B5EF4-FFF2-40B4-BE49-F238E27FC236}">
-                <a16:creationId xmlns:a16="http://schemas.microsoft.com/office/drawing/2014/main" xmlns="" id="{1E37391A-A319-228B-9DAE-7A653E23370C}"/>
+                <a16:creationId xmlns:a16="http://schemas.microsoft.com/office/drawing/2014/main" id="{1E37391A-A319-228B-9DAE-7A653E23370C}"/>
               </a:ext>
             </a:extLst>
           </p:cNvPr>
@@ -5919,7 +5912,7 @@
           <p:cNvPr id="2" name="Date Placeholder 1">
             <a:extLst>
               <a:ext uri="{FF2B5EF4-FFF2-40B4-BE49-F238E27FC236}">
-                <a16:creationId xmlns:a16="http://schemas.microsoft.com/office/drawing/2014/main" xmlns="" id="{03660472-8BBF-58DD-E968-012F39922D0F}"/>
+                <a16:creationId xmlns:a16="http://schemas.microsoft.com/office/drawing/2014/main" id="{03660472-8BBF-58DD-E968-012F39922D0F}"/>
               </a:ext>
             </a:extLst>
           </p:cNvPr>
@@ -5937,7 +5930,7 @@
           <a:p>
             <a:fld id="{230CBE3B-F631-459A-AA80-995C740CD196}" type="datetimeFigureOut">
               <a:rPr lang="en-US" smtClean="0"/>
-              <a:t>3/5/2025</a:t>
+              <a:t>8/22/25</a:t>
             </a:fld>
             <a:endParaRPr lang="en-US"/>
           </a:p>
@@ -5948,7 +5941,7 @@
           <p:cNvPr id="3" name="Footer Placeholder 2">
             <a:extLst>
               <a:ext uri="{FF2B5EF4-FFF2-40B4-BE49-F238E27FC236}">
-                <a16:creationId xmlns:a16="http://schemas.microsoft.com/office/drawing/2014/main" xmlns="" id="{E1C14943-30A3-459A-7D3D-E0B8FCDEE693}"/>
+                <a16:creationId xmlns:a16="http://schemas.microsoft.com/office/drawing/2014/main" id="{E1C14943-30A3-459A-7D3D-E0B8FCDEE693}"/>
               </a:ext>
             </a:extLst>
           </p:cNvPr>
@@ -5973,7 +5966,7 @@
           <p:cNvPr id="4" name="Slide Number Placeholder 3">
             <a:extLst>
               <a:ext uri="{FF2B5EF4-FFF2-40B4-BE49-F238E27FC236}">
-                <a16:creationId xmlns:a16="http://schemas.microsoft.com/office/drawing/2014/main" xmlns="" id="{D5569E84-FEEC-57EB-6E90-333C911D9FD8}"/>
+                <a16:creationId xmlns:a16="http://schemas.microsoft.com/office/drawing/2014/main" id="{D5569E84-FEEC-57EB-6E90-333C911D9FD8}"/>
               </a:ext>
             </a:extLst>
           </p:cNvPr>
@@ -6044,7 +6037,7 @@
           <p:cNvPr id="2" name="Title 1">
             <a:extLst>
               <a:ext uri="{FF2B5EF4-FFF2-40B4-BE49-F238E27FC236}">
-                <a16:creationId xmlns:a16="http://schemas.microsoft.com/office/drawing/2014/main" xmlns="" id="{F183B7F8-FACF-9A81-561A-ED22EBDB406A}"/>
+                <a16:creationId xmlns:a16="http://schemas.microsoft.com/office/drawing/2014/main" id="{F183B7F8-FACF-9A81-561A-ED22EBDB406A}"/>
               </a:ext>
             </a:extLst>
           </p:cNvPr>
@@ -6081,7 +6074,7 @@
           <p:cNvPr id="3" name="Content Placeholder 2">
             <a:extLst>
               <a:ext uri="{FF2B5EF4-FFF2-40B4-BE49-F238E27FC236}">
-                <a16:creationId xmlns:a16="http://schemas.microsoft.com/office/drawing/2014/main" xmlns="" id="{63B37B76-A19F-43CA-04E9-413F0782FFF4}"/>
+                <a16:creationId xmlns:a16="http://schemas.microsoft.com/office/drawing/2014/main" id="{63B37B76-A19F-43CA-04E9-413F0782FFF4}"/>
               </a:ext>
             </a:extLst>
           </p:cNvPr>
@@ -6171,7 +6164,7 @@
           <p:cNvPr id="4" name="Text Placeholder 3">
             <a:extLst>
               <a:ext uri="{FF2B5EF4-FFF2-40B4-BE49-F238E27FC236}">
-                <a16:creationId xmlns:a16="http://schemas.microsoft.com/office/drawing/2014/main" xmlns="" id="{5E251025-0988-56F8-7319-2E83239D0466}"/>
+                <a16:creationId xmlns:a16="http://schemas.microsoft.com/office/drawing/2014/main" id="{5E251025-0988-56F8-7319-2E83239D0466}"/>
               </a:ext>
             </a:extLst>
           </p:cNvPr>
@@ -6242,7 +6235,7 @@
           <p:cNvPr id="5" name="Date Placeholder 4">
             <a:extLst>
               <a:ext uri="{FF2B5EF4-FFF2-40B4-BE49-F238E27FC236}">
-                <a16:creationId xmlns:a16="http://schemas.microsoft.com/office/drawing/2014/main" xmlns="" id="{9D982239-F726-95E6-92D5-15CEF883B617}"/>
+                <a16:creationId xmlns:a16="http://schemas.microsoft.com/office/drawing/2014/main" id="{9D982239-F726-95E6-92D5-15CEF883B617}"/>
               </a:ext>
             </a:extLst>
           </p:cNvPr>
@@ -6260,7 +6253,7 @@
           <a:p>
             <a:fld id="{230CBE3B-F631-459A-AA80-995C740CD196}" type="datetimeFigureOut">
               <a:rPr lang="en-US" smtClean="0"/>
-              <a:t>3/5/2025</a:t>
+              <a:t>8/22/25</a:t>
             </a:fld>
             <a:endParaRPr lang="en-US"/>
           </a:p>
@@ -6271,7 +6264,7 @@
           <p:cNvPr id="6" name="Footer Placeholder 5">
             <a:extLst>
               <a:ext uri="{FF2B5EF4-FFF2-40B4-BE49-F238E27FC236}">
-                <a16:creationId xmlns:a16="http://schemas.microsoft.com/office/drawing/2014/main" xmlns="" id="{9C86F175-9104-7C32-54C0-6B5B02D0728D}"/>
+                <a16:creationId xmlns:a16="http://schemas.microsoft.com/office/drawing/2014/main" id="{9C86F175-9104-7C32-54C0-6B5B02D0728D}"/>
               </a:ext>
             </a:extLst>
           </p:cNvPr>
@@ -6296,7 +6289,7 @@
           <p:cNvPr id="7" name="Slide Number Placeholder 6">
             <a:extLst>
               <a:ext uri="{FF2B5EF4-FFF2-40B4-BE49-F238E27FC236}">
-                <a16:creationId xmlns:a16="http://schemas.microsoft.com/office/drawing/2014/main" xmlns="" id="{E9EA534A-50A3-D1AF-5111-03E06738FA3F}"/>
+                <a16:creationId xmlns:a16="http://schemas.microsoft.com/office/drawing/2014/main" id="{E9EA534A-50A3-D1AF-5111-03E06738FA3F}"/>
               </a:ext>
             </a:extLst>
           </p:cNvPr>
@@ -6367,7 +6360,7 @@
           <p:cNvPr id="2" name="Title 1">
             <a:extLst>
               <a:ext uri="{FF2B5EF4-FFF2-40B4-BE49-F238E27FC236}">
-                <a16:creationId xmlns:a16="http://schemas.microsoft.com/office/drawing/2014/main" xmlns="" id="{6EA1606E-A54D-6DD5-906D-FDC43AD28B34}"/>
+                <a16:creationId xmlns:a16="http://schemas.microsoft.com/office/drawing/2014/main" id="{6EA1606E-A54D-6DD5-906D-FDC43AD28B34}"/>
               </a:ext>
             </a:extLst>
           </p:cNvPr>
@@ -6404,7 +6397,7 @@
           <p:cNvPr id="3" name="Picture Placeholder 2">
             <a:extLst>
               <a:ext uri="{FF2B5EF4-FFF2-40B4-BE49-F238E27FC236}">
-                <a16:creationId xmlns:a16="http://schemas.microsoft.com/office/drawing/2014/main" xmlns="" id="{279C22A3-9B75-F163-06A7-2CDB8E86B279}"/>
+                <a16:creationId xmlns:a16="http://schemas.microsoft.com/office/drawing/2014/main" id="{279C22A3-9B75-F163-06A7-2CDB8E86B279}"/>
               </a:ext>
             </a:extLst>
           </p:cNvPr>
@@ -6471,7 +6464,7 @@
           <p:cNvPr id="4" name="Text Placeholder 3">
             <a:extLst>
               <a:ext uri="{FF2B5EF4-FFF2-40B4-BE49-F238E27FC236}">
-                <a16:creationId xmlns:a16="http://schemas.microsoft.com/office/drawing/2014/main" xmlns="" id="{94CD6B29-6961-E6E7-7179-FFA8A3432C96}"/>
+                <a16:creationId xmlns:a16="http://schemas.microsoft.com/office/drawing/2014/main" id="{94CD6B29-6961-E6E7-7179-FFA8A3432C96}"/>
               </a:ext>
             </a:extLst>
           </p:cNvPr>
@@ -6542,7 +6535,7 @@
           <p:cNvPr id="5" name="Date Placeholder 4">
             <a:extLst>
               <a:ext uri="{FF2B5EF4-FFF2-40B4-BE49-F238E27FC236}">
-                <a16:creationId xmlns:a16="http://schemas.microsoft.com/office/drawing/2014/main" xmlns="" id="{5D143FD1-C16D-EFA5-A32D-FEF407B95EA0}"/>
+                <a16:creationId xmlns:a16="http://schemas.microsoft.com/office/drawing/2014/main" id="{5D143FD1-C16D-EFA5-A32D-FEF407B95EA0}"/>
               </a:ext>
             </a:extLst>
           </p:cNvPr>
@@ -6560,7 +6553,7 @@
           <a:p>
             <a:fld id="{230CBE3B-F631-459A-AA80-995C740CD196}" type="datetimeFigureOut">
               <a:rPr lang="en-US" smtClean="0"/>
-              <a:t>3/5/2025</a:t>
+              <a:t>8/22/25</a:t>
             </a:fld>
             <a:endParaRPr lang="en-US"/>
           </a:p>
@@ -6571,7 +6564,7 @@
           <p:cNvPr id="6" name="Footer Placeholder 5">
             <a:extLst>
               <a:ext uri="{FF2B5EF4-FFF2-40B4-BE49-F238E27FC236}">
-                <a16:creationId xmlns:a16="http://schemas.microsoft.com/office/drawing/2014/main" xmlns="" id="{D515BBB4-54DC-891D-C663-908EC3616597}"/>
+                <a16:creationId xmlns:a16="http://schemas.microsoft.com/office/drawing/2014/main" id="{D515BBB4-54DC-891D-C663-908EC3616597}"/>
               </a:ext>
             </a:extLst>
           </p:cNvPr>
@@ -6596,7 +6589,7 @@
           <p:cNvPr id="7" name="Slide Number Placeholder 6">
             <a:extLst>
               <a:ext uri="{FF2B5EF4-FFF2-40B4-BE49-F238E27FC236}">
-                <a16:creationId xmlns:a16="http://schemas.microsoft.com/office/drawing/2014/main" xmlns="" id="{BE6C34A6-3578-CFAA-984A-A9F3353F1642}"/>
+                <a16:creationId xmlns:a16="http://schemas.microsoft.com/office/drawing/2014/main" id="{BE6C34A6-3578-CFAA-984A-A9F3353F1642}"/>
               </a:ext>
             </a:extLst>
           </p:cNvPr>
@@ -6670,7 +6663,7 @@
           <p:cNvPr id="2" name="Title Placeholder 1">
             <a:extLst>
               <a:ext uri="{FF2B5EF4-FFF2-40B4-BE49-F238E27FC236}">
-                <a16:creationId xmlns:a16="http://schemas.microsoft.com/office/drawing/2014/main" xmlns="" id="{30F9CB0A-9D36-C7D1-EF89-A737093890DF}"/>
+                <a16:creationId xmlns:a16="http://schemas.microsoft.com/office/drawing/2014/main" id="{30F9CB0A-9D36-C7D1-EF89-A737093890DF}"/>
               </a:ext>
             </a:extLst>
           </p:cNvPr>
@@ -6708,7 +6701,7 @@
           <p:cNvPr id="3" name="Text Placeholder 2">
             <a:extLst>
               <a:ext uri="{FF2B5EF4-FFF2-40B4-BE49-F238E27FC236}">
-                <a16:creationId xmlns:a16="http://schemas.microsoft.com/office/drawing/2014/main" xmlns="" id="{80CD2335-8C8E-FC23-50F5-74675A4C7EEF}"/>
+                <a16:creationId xmlns:a16="http://schemas.microsoft.com/office/drawing/2014/main" id="{80CD2335-8C8E-FC23-50F5-74675A4C7EEF}"/>
               </a:ext>
             </a:extLst>
           </p:cNvPr>
@@ -6775,7 +6768,7 @@
           <p:cNvPr id="4" name="Date Placeholder 3">
             <a:extLst>
               <a:ext uri="{FF2B5EF4-FFF2-40B4-BE49-F238E27FC236}">
-                <a16:creationId xmlns:a16="http://schemas.microsoft.com/office/drawing/2014/main" xmlns="" id="{81662C67-EF9A-BBB6-E05C-587A20D65EFE}"/>
+                <a16:creationId xmlns:a16="http://schemas.microsoft.com/office/drawing/2014/main" id="{81662C67-EF9A-BBB6-E05C-587A20D65EFE}"/>
               </a:ext>
             </a:extLst>
           </p:cNvPr>
@@ -6811,7 +6804,7 @@
           <a:p>
             <a:fld id="{230CBE3B-F631-459A-AA80-995C740CD196}" type="datetimeFigureOut">
               <a:rPr lang="en-US" smtClean="0"/>
-              <a:t>3/5/2025</a:t>
+              <a:t>8/22/25</a:t>
             </a:fld>
             <a:endParaRPr lang="en-US"/>
           </a:p>
@@ -6822,7 +6815,7 @@
           <p:cNvPr id="5" name="Footer Placeholder 4">
             <a:extLst>
               <a:ext uri="{FF2B5EF4-FFF2-40B4-BE49-F238E27FC236}">
-                <a16:creationId xmlns:a16="http://schemas.microsoft.com/office/drawing/2014/main" xmlns="" id="{FD3DCD37-1384-4395-C7D0-71944C91CC33}"/>
+                <a16:creationId xmlns:a16="http://schemas.microsoft.com/office/drawing/2014/main" id="{FD3DCD37-1384-4395-C7D0-71944C91CC33}"/>
               </a:ext>
             </a:extLst>
           </p:cNvPr>
@@ -6865,7 +6858,7 @@
           <p:cNvPr id="6" name="Slide Number Placeholder 5">
             <a:extLst>
               <a:ext uri="{FF2B5EF4-FFF2-40B4-BE49-F238E27FC236}">
-                <a16:creationId xmlns:a16="http://schemas.microsoft.com/office/drawing/2014/main" xmlns="" id="{CF287F36-D393-9F7C-6433-9F62AA9A635A}"/>
+                <a16:creationId xmlns:a16="http://schemas.microsoft.com/office/drawing/2014/main" id="{CF287F36-D393-9F7C-6433-9F62AA9A635A}"/>
               </a:ext>
             </a:extLst>
           </p:cNvPr>
@@ -7369,8 +7362,8 @@
         </p:nvSpPr>
         <p:spPr>
           <a:xfrm>
-            <a:off x="997527" y="117475"/>
-            <a:ext cx="10796540" cy="516268"/>
+            <a:off x="997527" y="268617"/>
+            <a:ext cx="10796540" cy="365126"/>
           </a:xfrm>
           <a:prstGeom prst="rect">
             <a:avLst/>
@@ -7396,10 +7389,18 @@
               <a:buNone/>
             </a:pPr>
             <a:r>
-              <a:rPr lang="en-US" dirty="0"/>
+              <a:rPr lang="en-US" dirty="0">
+                <a:highlight>
+                  <a:srgbClr val="FFFF00"/>
+                </a:highlight>
+              </a:rPr>
               <a:t>Plan-driven and agile development</a:t>
             </a:r>
-            <a:endParaRPr dirty="0"/>
+            <a:endParaRPr dirty="0">
+              <a:highlight>
+                <a:srgbClr val="FFFF00"/>
+              </a:highlight>
+            </a:endParaRPr>
           </a:p>
         </p:txBody>
       </p:sp>
@@ -7431,6 +7432,29 @@
             <a:noAutofit/>
           </a:bodyPr>
           <a:lstStyle/>
+          <a:p>
+            <a:pPr marL="0" lvl="0" indent="0" algn="l" rtl="0">
+              <a:spcBef>
+                <a:spcPts val="0"/>
+              </a:spcBef>
+              <a:spcAft>
+                <a:spcPts val="0"/>
+              </a:spcAft>
+              <a:buSzPts val="2640"/>
+              <a:buNone/>
+            </a:pPr>
+            <a:r>
+              <a:rPr lang="en-GB" b="1" dirty="0">
+                <a:effectLst/>
+              </a:rPr>
+              <a:t>Q:</a:t>
+            </a:r>
+            <a:r>
+              <a:rPr lang="en-GB" dirty="0"/>
+              <a:t> Differentiate between Plan-driven development and Agile development.</a:t>
+            </a:r>
+            <a:endParaRPr lang="en-US" b="1" dirty="0"/>
+          </a:p>
           <a:p>
             <a:pPr marL="342900" lvl="0" indent="-342900" algn="l" rtl="0">
               <a:spcBef>
@@ -7699,9 +7723,8 @@
             </a:pPr>
             <a:r>
               <a:rPr lang="en-US" dirty="0"/>
-              <a:t>Agile methods</a:t>
-            </a:r>
-            <a:endParaRPr dirty="0"/>
+              <a:t>Agile methods </a:t>
+            </a:r>
           </a:p>
         </p:txBody>
       </p:sp>
@@ -7733,6 +7756,38 @@
             <a:noAutofit/>
           </a:bodyPr>
           <a:lstStyle/>
+          <a:p>
+            <a:pPr>
+              <a:buFont typeface="+mj-lt"/>
+              <a:buAutoNum type="arabicPeriod"/>
+            </a:pPr>
+            <a:r>
+              <a:rPr lang="en-GB" b="1" dirty="0">
+                <a:highlight>
+                  <a:srgbClr val="FFFF00"/>
+                </a:highlight>
+              </a:rPr>
+              <a:t>Q:</a:t>
+            </a:r>
+            <a:r>
+              <a:rPr lang="en-GB" dirty="0">
+                <a:highlight>
+                  <a:srgbClr val="FFFF00"/>
+                </a:highlight>
+              </a:rPr>
+              <a:t> Why did Agile methods emerge?</a:t>
+            </a:r>
+          </a:p>
+          <a:p>
+            <a:pPr marL="0" indent="0">
+              <a:buNone/>
+            </a:pPr>
+            <a:endParaRPr lang="en-US" b="1" dirty="0">
+              <a:solidFill>
+                <a:srgbClr val="C00000"/>
+              </a:solidFill>
+            </a:endParaRPr>
+          </a:p>
           <a:p>
             <a:pPr marL="342900" lvl="0" indent="-342900" algn="l" rtl="0">
               <a:spcBef>
@@ -8427,14 +8482,14 @@
                 <a:gridCol w="2475716">
                   <a:extLst>
                     <a:ext uri="{9D8B030D-6E8A-4147-A177-3AD203B41FA5}">
-                      <a16:colId xmlns:a16="http://schemas.microsoft.com/office/drawing/2014/main" xmlns="" val="20000"/>
+                      <a16:colId xmlns:a16="http://schemas.microsoft.com/office/drawing/2014/main" val="20000"/>
                     </a:ext>
                   </a:extLst>
                 </a:gridCol>
                 <a:gridCol w="7899552">
                   <a:extLst>
                     <a:ext uri="{9D8B030D-6E8A-4147-A177-3AD203B41FA5}">
-                      <a16:colId xmlns:a16="http://schemas.microsoft.com/office/drawing/2014/main" xmlns="" val="20001"/>
+                      <a16:colId xmlns:a16="http://schemas.microsoft.com/office/drawing/2014/main" val="20001"/>
                     </a:ext>
                   </a:extLst>
                 </a:gridCol>
@@ -8528,7 +8583,7 @@
                 </a:tc>
                 <a:extLst>
                   <a:ext uri="{0D108BD9-81ED-4DB2-BD59-A6C34878D82A}">
-                    <a16:rowId xmlns:a16="http://schemas.microsoft.com/office/drawing/2014/main" xmlns="" val="10000"/>
+                    <a16:rowId xmlns:a16="http://schemas.microsoft.com/office/drawing/2014/main" val="10000"/>
                   </a:ext>
                 </a:extLst>
               </a:tr>
@@ -8637,7 +8692,7 @@
                 </a:tc>
                 <a:extLst>
                   <a:ext uri="{0D108BD9-81ED-4DB2-BD59-A6C34878D82A}">
-                    <a16:rowId xmlns:a16="http://schemas.microsoft.com/office/drawing/2014/main" xmlns="" val="10001"/>
+                    <a16:rowId xmlns:a16="http://schemas.microsoft.com/office/drawing/2014/main" val="10001"/>
                   </a:ext>
                 </a:extLst>
               </a:tr>
@@ -8754,7 +8809,7 @@
                 </a:tc>
                 <a:extLst>
                   <a:ext uri="{0D108BD9-81ED-4DB2-BD59-A6C34878D82A}">
-                    <a16:rowId xmlns:a16="http://schemas.microsoft.com/office/drawing/2014/main" xmlns="" val="10002"/>
+                    <a16:rowId xmlns:a16="http://schemas.microsoft.com/office/drawing/2014/main" val="10002"/>
                   </a:ext>
                 </a:extLst>
               </a:tr>
@@ -8879,7 +8934,7 @@
                 </a:tc>
                 <a:extLst>
                   <a:ext uri="{0D108BD9-81ED-4DB2-BD59-A6C34878D82A}">
-                    <a16:rowId xmlns:a16="http://schemas.microsoft.com/office/drawing/2014/main" xmlns="" val="10003"/>
+                    <a16:rowId xmlns:a16="http://schemas.microsoft.com/office/drawing/2014/main" val="10003"/>
                   </a:ext>
                 </a:extLst>
               </a:tr>
@@ -8988,7 +9043,7 @@
                 </a:tc>
                 <a:extLst>
                   <a:ext uri="{0D108BD9-81ED-4DB2-BD59-A6C34878D82A}">
-                    <a16:rowId xmlns:a16="http://schemas.microsoft.com/office/drawing/2014/main" xmlns="" val="10004"/>
+                    <a16:rowId xmlns:a16="http://schemas.microsoft.com/office/drawing/2014/main" val="10004"/>
                   </a:ext>
                 </a:extLst>
               </a:tr>
@@ -9133,7 +9188,7 @@
                 </a:tc>
                 <a:extLst>
                   <a:ext uri="{0D108BD9-81ED-4DB2-BD59-A6C34878D82A}">
-                    <a16:rowId xmlns:a16="http://schemas.microsoft.com/office/drawing/2014/main" xmlns="" val="10005"/>
+                    <a16:rowId xmlns:a16="http://schemas.microsoft.com/office/drawing/2014/main" val="10005"/>
                   </a:ext>
                 </a:extLst>
               </a:tr>
@@ -9427,10 +9482,18 @@
           <a:p>
             <a:pPr lvl="0"/>
             <a:r>
-              <a:rPr lang="en-US" dirty="0"/>
+              <a:rPr lang="en-US" dirty="0">
+                <a:highlight>
+                  <a:srgbClr val="FFFF00"/>
+                </a:highlight>
+              </a:rPr>
               <a:t>Extreme programming (XP) </a:t>
             </a:r>
-            <a:endParaRPr dirty="0"/>
+            <a:endParaRPr dirty="0">
+              <a:highlight>
+                <a:srgbClr val="FFFF00"/>
+              </a:highlight>
+            </a:endParaRPr>
           </a:p>
         </p:txBody>
       </p:sp>
@@ -9765,7 +9828,11 @@
               <a:buNone/>
             </a:pPr>
             <a:r>
-              <a:rPr lang="en-US" dirty="0"/>
+              <a:rPr lang="en-US" dirty="0">
+                <a:highlight>
+                  <a:srgbClr val="FFFF00"/>
+                </a:highlight>
+              </a:rPr>
               <a:t>The extreme programming release </a:t>
             </a:r>
             <a:r>
@@ -9773,6 +9840,9 @@
                 <a:solidFill>
                   <a:srgbClr val="C00000"/>
                 </a:solidFill>
+                <a:highlight>
+                  <a:srgbClr val="FFFF00"/>
+                </a:highlight>
               </a:rPr>
               <a:t>cycle </a:t>
             </a:r>
@@ -9780,6 +9850,9 @@
               <a:solidFill>
                 <a:srgbClr val="C00000"/>
               </a:solidFill>
+              <a:highlight>
+                <a:srgbClr val="FFFF00"/>
+              </a:highlight>
             </a:endParaRPr>
           </a:p>
         </p:txBody>
@@ -9920,7 +9993,11 @@
               <a:buNone/>
             </a:pPr>
             <a:r>
-              <a:rPr lang="en-US" dirty="0"/>
+              <a:rPr lang="en-US" dirty="0">
+                <a:highlight>
+                  <a:srgbClr val="FFFF00"/>
+                </a:highlight>
+              </a:rPr>
               <a:t>Extreme programming </a:t>
             </a:r>
             <a:r>
@@ -9928,14 +10005,25 @@
                 <a:solidFill>
                   <a:srgbClr val="FF0000"/>
                 </a:solidFill>
+                <a:highlight>
+                  <a:srgbClr val="FFFF00"/>
+                </a:highlight>
               </a:rPr>
               <a:t>principles/practices </a:t>
             </a:r>
             <a:r>
-              <a:rPr lang="en-US" dirty="0"/>
+              <a:rPr lang="en-US" dirty="0">
+                <a:highlight>
+                  <a:srgbClr val="FFFF00"/>
+                </a:highlight>
+              </a:rPr>
               <a:t>(a) </a:t>
             </a:r>
-            <a:endParaRPr dirty="0"/>
+            <a:endParaRPr dirty="0">
+              <a:highlight>
+                <a:srgbClr val="FFFF00"/>
+              </a:highlight>
+            </a:endParaRPr>
           </a:p>
         </p:txBody>
       </p:sp>
@@ -10008,14 +10096,14 @@
                 <a:gridCol w="2819625">
                   <a:extLst>
                     <a:ext uri="{9D8B030D-6E8A-4147-A177-3AD203B41FA5}">
-                      <a16:colId xmlns:a16="http://schemas.microsoft.com/office/drawing/2014/main" xmlns="" val="20000"/>
+                      <a16:colId xmlns:a16="http://schemas.microsoft.com/office/drawing/2014/main" val="20000"/>
                     </a:ext>
                   </a:extLst>
                 </a:gridCol>
                 <a:gridCol w="7128725">
                   <a:extLst>
                     <a:ext uri="{9D8B030D-6E8A-4147-A177-3AD203B41FA5}">
-                      <a16:colId xmlns:a16="http://schemas.microsoft.com/office/drawing/2014/main" xmlns="" val="20001"/>
+                      <a16:colId xmlns:a16="http://schemas.microsoft.com/office/drawing/2014/main" val="20001"/>
                     </a:ext>
                   </a:extLst>
                 </a:gridCol>
@@ -10109,7 +10197,7 @@
                 </a:tc>
                 <a:extLst>
                   <a:ext uri="{0D108BD9-81ED-4DB2-BD59-A6C34878D82A}">
-                    <a16:rowId xmlns:a16="http://schemas.microsoft.com/office/drawing/2014/main" xmlns="" val="10000"/>
+                    <a16:rowId xmlns:a16="http://schemas.microsoft.com/office/drawing/2014/main" val="10000"/>
                   </a:ext>
                 </a:extLst>
               </a:tr>
@@ -10202,7 +10290,7 @@
                 </a:tc>
                 <a:extLst>
                   <a:ext uri="{0D108BD9-81ED-4DB2-BD59-A6C34878D82A}">
-                    <a16:rowId xmlns:a16="http://schemas.microsoft.com/office/drawing/2014/main" xmlns="" val="10001"/>
+                    <a16:rowId xmlns:a16="http://schemas.microsoft.com/office/drawing/2014/main" val="10001"/>
                   </a:ext>
                 </a:extLst>
               </a:tr>
@@ -10295,7 +10383,7 @@
                 </a:tc>
                 <a:extLst>
                   <a:ext uri="{0D108BD9-81ED-4DB2-BD59-A6C34878D82A}">
-                    <a16:rowId xmlns:a16="http://schemas.microsoft.com/office/drawing/2014/main" xmlns="" val="10002"/>
+                    <a16:rowId xmlns:a16="http://schemas.microsoft.com/office/drawing/2014/main" val="10002"/>
                   </a:ext>
                 </a:extLst>
               </a:tr>
@@ -10388,7 +10476,7 @@
                 </a:tc>
                 <a:extLst>
                   <a:ext uri="{0D108BD9-81ED-4DB2-BD59-A6C34878D82A}">
-                    <a16:rowId xmlns:a16="http://schemas.microsoft.com/office/drawing/2014/main" xmlns="" val="10003"/>
+                    <a16:rowId xmlns:a16="http://schemas.microsoft.com/office/drawing/2014/main" val="10003"/>
                   </a:ext>
                 </a:extLst>
               </a:tr>
@@ -10481,7 +10569,7 @@
                 </a:tc>
                 <a:extLst>
                   <a:ext uri="{0D108BD9-81ED-4DB2-BD59-A6C34878D82A}">
-                    <a16:rowId xmlns:a16="http://schemas.microsoft.com/office/drawing/2014/main" xmlns="" val="10004"/>
+                    <a16:rowId xmlns:a16="http://schemas.microsoft.com/office/drawing/2014/main" val="10004"/>
                   </a:ext>
                 </a:extLst>
               </a:tr>
@@ -10574,7 +10662,7 @@
                 </a:tc>
                 <a:extLst>
                   <a:ext uri="{0D108BD9-81ED-4DB2-BD59-A6C34878D82A}">
-                    <a16:rowId xmlns:a16="http://schemas.microsoft.com/office/drawing/2014/main" xmlns="" val="10005"/>
+                    <a16:rowId xmlns:a16="http://schemas.microsoft.com/office/drawing/2014/main" val="10005"/>
                   </a:ext>
                 </a:extLst>
               </a:tr>
@@ -10649,10 +10737,18 @@
               <a:buNone/>
             </a:pPr>
             <a:r>
-              <a:rPr lang="en-US" dirty="0"/>
+              <a:rPr lang="en-US" dirty="0">
+                <a:highlight>
+                  <a:srgbClr val="FFFF00"/>
+                </a:highlight>
+              </a:rPr>
               <a:t>Extreme programming practices (b)</a:t>
             </a:r>
-            <a:endParaRPr dirty="0"/>
+            <a:endParaRPr dirty="0">
+              <a:highlight>
+                <a:srgbClr val="FFFF00"/>
+              </a:highlight>
+            </a:endParaRPr>
           </a:p>
         </p:txBody>
       </p:sp>
@@ -10725,14 +10821,14 @@
                 <a:gridCol w="2996668">
                   <a:extLst>
                     <a:ext uri="{9D8B030D-6E8A-4147-A177-3AD203B41FA5}">
-                      <a16:colId xmlns:a16="http://schemas.microsoft.com/office/drawing/2014/main" xmlns="" val="20000"/>
+                      <a16:colId xmlns:a16="http://schemas.microsoft.com/office/drawing/2014/main" val="20000"/>
                     </a:ext>
                   </a:extLst>
                 </a:gridCol>
                 <a:gridCol w="7776767">
                   <a:extLst>
                     <a:ext uri="{9D8B030D-6E8A-4147-A177-3AD203B41FA5}">
-                      <a16:colId xmlns:a16="http://schemas.microsoft.com/office/drawing/2014/main" xmlns="" val="20001"/>
+                      <a16:colId xmlns:a16="http://schemas.microsoft.com/office/drawing/2014/main" val="20001"/>
                     </a:ext>
                   </a:extLst>
                 </a:gridCol>
@@ -10806,7 +10902,7 @@
                 </a:tc>
                 <a:extLst>
                   <a:ext uri="{0D108BD9-81ED-4DB2-BD59-A6C34878D82A}">
-                    <a16:rowId xmlns:a16="http://schemas.microsoft.com/office/drawing/2014/main" xmlns="" val="10000"/>
+                    <a16:rowId xmlns:a16="http://schemas.microsoft.com/office/drawing/2014/main" val="10000"/>
                   </a:ext>
                 </a:extLst>
               </a:tr>
@@ -10879,7 +10975,7 @@
                 </a:tc>
                 <a:extLst>
                   <a:ext uri="{0D108BD9-81ED-4DB2-BD59-A6C34878D82A}">
-                    <a16:rowId xmlns:a16="http://schemas.microsoft.com/office/drawing/2014/main" xmlns="" val="10001"/>
+                    <a16:rowId xmlns:a16="http://schemas.microsoft.com/office/drawing/2014/main" val="10001"/>
                   </a:ext>
                 </a:extLst>
               </a:tr>
@@ -10952,7 +11048,7 @@
                 </a:tc>
                 <a:extLst>
                   <a:ext uri="{0D108BD9-81ED-4DB2-BD59-A6C34878D82A}">
-                    <a16:rowId xmlns:a16="http://schemas.microsoft.com/office/drawing/2014/main" xmlns="" val="10002"/>
+                    <a16:rowId xmlns:a16="http://schemas.microsoft.com/office/drawing/2014/main" val="10002"/>
                   </a:ext>
                 </a:extLst>
               </a:tr>
@@ -11025,7 +11121,7 @@
                 </a:tc>
                 <a:extLst>
                   <a:ext uri="{0D108BD9-81ED-4DB2-BD59-A6C34878D82A}">
-                    <a16:rowId xmlns:a16="http://schemas.microsoft.com/office/drawing/2014/main" xmlns="" val="10003"/>
+                    <a16:rowId xmlns:a16="http://schemas.microsoft.com/office/drawing/2014/main" val="10003"/>
                   </a:ext>
                 </a:extLst>
               </a:tr>
@@ -11098,7 +11194,7 @@
                 </a:tc>
                 <a:extLst>
                   <a:ext uri="{0D108BD9-81ED-4DB2-BD59-A6C34878D82A}">
-                    <a16:rowId xmlns:a16="http://schemas.microsoft.com/office/drawing/2014/main" xmlns="" val="10004"/>
+                    <a16:rowId xmlns:a16="http://schemas.microsoft.com/office/drawing/2014/main" val="10004"/>
                   </a:ext>
                 </a:extLst>
               </a:tr>
@@ -11294,7 +11390,7 @@
           <p:cNvPr id="2" name="Title 1">
             <a:extLst>
               <a:ext uri="{FF2B5EF4-FFF2-40B4-BE49-F238E27FC236}">
-                <a16:creationId xmlns:a16="http://schemas.microsoft.com/office/drawing/2014/main" xmlns="" id="{F8273FFA-E7D0-D64D-E0C6-490AC6527883}"/>
+                <a16:creationId xmlns:a16="http://schemas.microsoft.com/office/drawing/2014/main" id="{F8273FFA-E7D0-D64D-E0C6-490AC6527883}"/>
               </a:ext>
             </a:extLst>
           </p:cNvPr>
@@ -11333,7 +11429,7 @@
           <p:cNvPr id="3" name="Content Placeholder 2">
             <a:extLst>
               <a:ext uri="{FF2B5EF4-FFF2-40B4-BE49-F238E27FC236}">
-                <a16:creationId xmlns:a16="http://schemas.microsoft.com/office/drawing/2014/main" xmlns="" id="{46931DFA-B515-8C7A-74F5-FC1C41AA6B89}"/>
+                <a16:creationId xmlns:a16="http://schemas.microsoft.com/office/drawing/2014/main" id="{46931DFA-B515-8C7A-74F5-FC1C41AA6B89}"/>
               </a:ext>
             </a:extLst>
           </p:cNvPr>
@@ -11355,7 +11451,11 @@
           <a:lstStyle/>
           <a:p>
             <a:r>
-              <a:rPr lang="en-US" dirty="0"/>
+              <a:rPr lang="en-US" dirty="0">
+                <a:highlight>
+                  <a:srgbClr val="FFFF00"/>
+                </a:highlight>
+              </a:rPr>
               <a:t>An agile philosophy for software engineering stresses four key issues:</a:t>
             </a:r>
           </a:p>
@@ -11364,7 +11464,11 @@
               <a:buAutoNum type="romanLcPeriod"/>
             </a:pPr>
             <a:r>
-              <a:rPr lang="en-US" dirty="0"/>
+              <a:rPr lang="en-US" dirty="0">
+                <a:solidFill>
+                  <a:schemeClr val="accent5"/>
+                </a:solidFill>
+              </a:rPr>
               <a:t>The importance of self organizing teams that have control over the work they perform</a:t>
             </a:r>
           </a:p>
@@ -11373,16 +11477,58 @@
               <a:buAutoNum type="romanLcPeriod"/>
             </a:pPr>
             <a:r>
-              <a:rPr lang="en-US" dirty="0"/>
+              <a:rPr lang="en-US" dirty="0">
+                <a:solidFill>
+                  <a:schemeClr val="accent5"/>
+                </a:solidFill>
+              </a:rPr>
               <a:t>Communication and collaboration between team members and </a:t>
             </a:r>
             <a:r>
-              <a:rPr lang="en-US" dirty="0" err="1"/>
+              <a:rPr lang="en-US" dirty="0" err="1">
+                <a:solidFill>
+                  <a:schemeClr val="accent5"/>
+                </a:solidFill>
+              </a:rPr>
               <a:t>and</a:t>
             </a:r>
             <a:r>
-              <a:rPr lang="en-US" dirty="0"/>
+              <a:rPr lang="en-US" dirty="0">
+                <a:solidFill>
+                  <a:schemeClr val="accent5"/>
+                </a:solidFill>
+              </a:rPr>
               <a:t> between practitioners and their customers </a:t>
+            </a:r>
+          </a:p>
+          <a:p>
+            <a:pPr marL="571500" indent="-571500">
+              <a:buFont typeface="Arial" panose="020B0604020202020204" pitchFamily="34" charset="0"/>
+              <a:buAutoNum type="romanLcPeriod"/>
+            </a:pPr>
+            <a:r>
+              <a:rPr lang="en-GB" dirty="0">
+                <a:solidFill>
+                  <a:schemeClr val="accent5"/>
+                </a:solidFill>
+              </a:rPr>
+              <a:t>Viewing </a:t>
+            </a:r>
+            <a:r>
+              <a:rPr lang="en-GB" b="1" dirty="0">
+                <a:solidFill>
+                  <a:schemeClr val="accent5"/>
+                </a:solidFill>
+              </a:rPr>
+              <a:t>change as an opportunity</a:t>
+            </a:r>
+            <a:r>
+              <a:rPr lang="en-GB" dirty="0">
+                <a:solidFill>
+                  <a:schemeClr val="accent5"/>
+                </a:solidFill>
+              </a:rPr>
+              <a:t> rather than a threat.</a:t>
             </a:r>
           </a:p>
           <a:p>
@@ -11390,16 +11536,11 @@
               <a:buAutoNum type="romanLcPeriod"/>
             </a:pPr>
             <a:r>
-              <a:rPr lang="en-US" dirty="0"/>
-              <a:t>A recognition that change represents an opportunity and</a:t>
-            </a:r>
-          </a:p>
-          <a:p>
-            <a:pPr marL="571500" indent="-571500">
-              <a:buAutoNum type="romanLcPeriod"/>
-            </a:pPr>
-            <a:r>
-              <a:rPr lang="en-US" dirty="0"/>
+              <a:rPr lang="en-US" dirty="0">
+                <a:solidFill>
+                  <a:schemeClr val="accent5"/>
+                </a:solidFill>
+              </a:rPr>
               <a:t>An emphasis on rapid delivery of software that satisfies the customers</a:t>
             </a:r>
           </a:p>
@@ -11906,7 +12047,11 @@
               <a:buNone/>
             </a:pPr>
             <a:r>
-              <a:rPr lang="en-US" dirty="0"/>
+              <a:rPr lang="en-US" dirty="0">
+                <a:highlight>
+                  <a:srgbClr val="FFFF00"/>
+                </a:highlight>
+              </a:rPr>
               <a:t>Test-driven development (</a:t>
             </a:r>
             <a:r>
@@ -11914,14 +12059,25 @@
                 <a:solidFill>
                   <a:srgbClr val="C00000"/>
                 </a:solidFill>
+                <a:highlight>
+                  <a:srgbClr val="FFFF00"/>
+                </a:highlight>
               </a:rPr>
               <a:t>TDD</a:t>
             </a:r>
             <a:r>
-              <a:rPr lang="en-US" dirty="0"/>
+              <a:rPr lang="en-US" dirty="0">
+                <a:highlight>
+                  <a:srgbClr val="FFFF00"/>
+                </a:highlight>
+              </a:rPr>
               <a:t>)</a:t>
             </a:r>
-            <a:endParaRPr dirty="0"/>
+            <a:endParaRPr dirty="0">
+              <a:highlight>
+                <a:srgbClr val="FFFF00"/>
+              </a:highlight>
+            </a:endParaRPr>
           </a:p>
         </p:txBody>
       </p:sp>
@@ -13045,7 +13201,7 @@
           <p:cNvPr id="2" name="Google Shape;332;p51">
             <a:extLst>
               <a:ext uri="{FF2B5EF4-FFF2-40B4-BE49-F238E27FC236}">
-                <a16:creationId xmlns:a16="http://schemas.microsoft.com/office/drawing/2014/main" xmlns="" id="{6377AF98-9CBC-7877-47AD-12AA3A7F7B91}"/>
+                <a16:creationId xmlns:a16="http://schemas.microsoft.com/office/drawing/2014/main" id="{6377AF98-9CBC-7877-47AD-12AA3A7F7B91}"/>
               </a:ext>
             </a:extLst>
           </p:cNvPr>
@@ -13097,13 +13253,20 @@
               </a:spcBef>
             </a:pPr>
             <a:r>
-              <a:rPr lang="en-US" dirty="0"/>
+              <a:rPr lang="en-US" dirty="0">
+                <a:highlight>
+                  <a:srgbClr val="FFFF00"/>
+                </a:highlight>
+              </a:rPr>
               <a:t>Scrum</a:t>
             </a:r>
             <a:endParaRPr lang="en-US" dirty="0">
               <a:solidFill>
                 <a:srgbClr val="C00000"/>
               </a:solidFill>
+              <a:highlight>
+                <a:srgbClr val="FFFF00"/>
+              </a:highlight>
             </a:endParaRPr>
           </a:p>
         </p:txBody>
@@ -13330,10 +13493,18 @@
               <a:buNone/>
             </a:pPr>
             <a:r>
-              <a:rPr lang="en-US" dirty="0"/>
+              <a:rPr lang="en-US" dirty="0">
+                <a:highlight>
+                  <a:srgbClr val="FFFF00"/>
+                </a:highlight>
+              </a:rPr>
               <a:t>The Scrum sprint cycle</a:t>
             </a:r>
-            <a:endParaRPr dirty="0"/>
+            <a:endParaRPr dirty="0">
+              <a:highlight>
+                <a:srgbClr val="FFFF00"/>
+              </a:highlight>
+            </a:endParaRPr>
           </a:p>
         </p:txBody>
       </p:sp>
@@ -13550,10 +13721,18 @@
               <a:buNone/>
             </a:pPr>
             <a:r>
-              <a:rPr lang="en-US" dirty="0"/>
+              <a:rPr lang="en-US" dirty="0">
+                <a:highlight>
+                  <a:srgbClr val="FFFF00"/>
+                </a:highlight>
+              </a:rPr>
               <a:t>Scrum benefits</a:t>
             </a:r>
-            <a:endParaRPr dirty="0"/>
+            <a:endParaRPr dirty="0">
+              <a:highlight>
+                <a:srgbClr val="FFFF00"/>
+              </a:highlight>
+            </a:endParaRPr>
           </a:p>
         </p:txBody>
       </p:sp>
@@ -13822,7 +14001,7 @@
           <p:cNvPr id="4" name="Title 1">
             <a:extLst>
               <a:ext uri="{FF2B5EF4-FFF2-40B4-BE49-F238E27FC236}">
-                <a16:creationId xmlns:a16="http://schemas.microsoft.com/office/drawing/2014/main" xmlns="" id="{26A94DD7-EC94-FFEE-5BD6-2C6DCB1E9AE0}"/>
+                <a16:creationId xmlns:a16="http://schemas.microsoft.com/office/drawing/2014/main" id="{26A94DD7-EC94-FFEE-5BD6-2C6DCB1E9AE0}"/>
               </a:ext>
             </a:extLst>
           </p:cNvPr>
@@ -13861,7 +14040,7 @@
           <p:cNvPr id="5" name="Content Placeholder 2">
             <a:extLst>
               <a:ext uri="{FF2B5EF4-FFF2-40B4-BE49-F238E27FC236}">
-                <a16:creationId xmlns:a16="http://schemas.microsoft.com/office/drawing/2014/main" xmlns="" id="{19EC1206-B5FC-2141-B80E-75381D670CD3}"/>
+                <a16:creationId xmlns:a16="http://schemas.microsoft.com/office/drawing/2014/main" id="{19EC1206-B5FC-2141-B80E-75381D670CD3}"/>
               </a:ext>
             </a:extLst>
           </p:cNvPr>
@@ -13889,7 +14068,11 @@
           </a:p>
           <a:p>
             <a:r>
-              <a:rPr lang="en-US" dirty="0"/>
+              <a:rPr lang="en-US" dirty="0">
+                <a:highlight>
+                  <a:srgbClr val="FFFF00"/>
+                </a:highlight>
+              </a:rPr>
               <a:t>An agile team is capable of appropriately respond to changes</a:t>
             </a:r>
           </a:p>
@@ -13964,7 +14147,7 @@
           <p:cNvPr id="4" name="Title 1">
             <a:extLst>
               <a:ext uri="{FF2B5EF4-FFF2-40B4-BE49-F238E27FC236}">
-                <a16:creationId xmlns:a16="http://schemas.microsoft.com/office/drawing/2014/main" xmlns="" id="{07B6549D-2A88-89F6-6C1E-CA1A6502764D}"/>
+                <a16:creationId xmlns:a16="http://schemas.microsoft.com/office/drawing/2014/main" id="{07B6549D-2A88-89F6-6C1E-CA1A6502764D}"/>
               </a:ext>
             </a:extLst>
           </p:cNvPr>
@@ -13992,6 +14175,9 @@
                 <a:solidFill>
                   <a:schemeClr val="accent1"/>
                 </a:solidFill>
+                <a:highlight>
+                  <a:srgbClr val="FFFF00"/>
+                </a:highlight>
               </a:rPr>
               <a:t>12 principles of Agile alliance</a:t>
             </a:r>
@@ -14003,7 +14189,7 @@
           <p:cNvPr id="5" name="Content Placeholder 2">
             <a:extLst>
               <a:ext uri="{FF2B5EF4-FFF2-40B4-BE49-F238E27FC236}">
-                <a16:creationId xmlns:a16="http://schemas.microsoft.com/office/drawing/2014/main" xmlns="" id="{5A9F45D0-6EA4-6C44-9557-33EC0E91B960}"/>
+                <a16:creationId xmlns:a16="http://schemas.microsoft.com/office/drawing/2014/main" id="{5A9F45D0-6EA4-6C44-9557-33EC0E91B960}"/>
               </a:ext>
             </a:extLst>
           </p:cNvPr>
@@ -14080,7 +14266,7 @@
             </a:r>
             <a:r>
               <a:rPr lang="en-US" dirty="0" err="1"/>
-              <a:t>conversassion</a:t>
+              <a:t>conversasion</a:t>
             </a:r>
             <a:r>
               <a:rPr lang="en-US" dirty="0"/>
@@ -14172,7 +14358,7 @@
           <p:cNvPr id="4" name="Title 1">
             <a:extLst>
               <a:ext uri="{FF2B5EF4-FFF2-40B4-BE49-F238E27FC236}">
-                <a16:creationId xmlns:a16="http://schemas.microsoft.com/office/drawing/2014/main" xmlns="" id="{21FBFE68-3DA3-F03E-B4AE-8347F946F72C}"/>
+                <a16:creationId xmlns:a16="http://schemas.microsoft.com/office/drawing/2014/main" id="{21FBFE68-3DA3-F03E-B4AE-8347F946F72C}"/>
               </a:ext>
             </a:extLst>
           </p:cNvPr>
@@ -14211,7 +14397,7 @@
           <p:cNvPr id="5" name="Content Placeholder 2">
             <a:extLst>
               <a:ext uri="{FF2B5EF4-FFF2-40B4-BE49-F238E27FC236}">
-                <a16:creationId xmlns:a16="http://schemas.microsoft.com/office/drawing/2014/main" xmlns="" id="{B433BD64-2D08-33F8-13BC-B23B7AD98F76}"/>
+                <a16:creationId xmlns:a16="http://schemas.microsoft.com/office/drawing/2014/main" id="{B433BD64-2D08-33F8-13BC-B23B7AD98F76}"/>
               </a:ext>
             </a:extLst>
           </p:cNvPr>
@@ -14233,7 +14419,11 @@
           <a:lstStyle/>
           <a:p>
             <a:r>
-              <a:rPr lang="en-US" dirty="0"/>
+              <a:rPr lang="en-US" dirty="0">
+                <a:highlight>
+                  <a:srgbClr val="FFFF00"/>
+                </a:highlight>
+              </a:rPr>
               <a:t>An agile software process is characterized by 3 key issues:</a:t>
             </a:r>
           </a:p>
@@ -14319,7 +14509,7 @@
           <p:cNvPr id="2" name="Title 1">
             <a:extLst>
               <a:ext uri="{FF2B5EF4-FFF2-40B4-BE49-F238E27FC236}">
-                <a16:creationId xmlns:a16="http://schemas.microsoft.com/office/drawing/2014/main" xmlns="" id="{005B26F4-320D-878E-4ED6-D32390EF1B73}"/>
+                <a16:creationId xmlns:a16="http://schemas.microsoft.com/office/drawing/2014/main" id="{005B26F4-320D-878E-4ED6-D32390EF1B73}"/>
               </a:ext>
             </a:extLst>
           </p:cNvPr>
@@ -14377,7 +14567,7 @@
           <p:cNvPr id="3" name="Content Placeholder 2">
             <a:extLst>
               <a:ext uri="{FF2B5EF4-FFF2-40B4-BE49-F238E27FC236}">
-                <a16:creationId xmlns:a16="http://schemas.microsoft.com/office/drawing/2014/main" xmlns="" id="{94484A7A-5DFE-3B43-B225-43B3270BA0DF}"/>
+                <a16:creationId xmlns:a16="http://schemas.microsoft.com/office/drawing/2014/main" id="{94484A7A-5DFE-3B43-B225-43B3270BA0DF}"/>
               </a:ext>
             </a:extLst>
           </p:cNvPr>
@@ -14566,7 +14756,11 @@
               <a:buNone/>
             </a:pPr>
             <a:r>
-              <a:rPr lang="en-US" dirty="0"/>
+              <a:rPr lang="en-US" dirty="0">
+                <a:highlight>
+                  <a:srgbClr val="FFFF00"/>
+                </a:highlight>
+              </a:rPr>
               <a:t>Some of the </a:t>
             </a:r>
             <a:r>
@@ -14574,10 +14768,17 @@
                 <a:solidFill>
                   <a:schemeClr val="accent1"/>
                 </a:solidFill>
+                <a:highlight>
+                  <a:srgbClr val="FFFF00"/>
+                </a:highlight>
               </a:rPr>
               <a:t>Agile Process Models:</a:t>
             </a:r>
-            <a:endParaRPr lang="en-US" dirty="0"/>
+            <a:endParaRPr lang="en-US" dirty="0">
+              <a:highlight>
+                <a:srgbClr val="FFFF00"/>
+              </a:highlight>
+            </a:endParaRPr>
           </a:p>
           <a:p>
             <a:pPr lvl="1"/>
@@ -14622,7 +14823,11 @@
           </a:p>
           <a:p>
             <a:r>
-              <a:rPr lang="en-US" dirty="0"/>
+              <a:rPr lang="en-US" dirty="0">
+                <a:solidFill>
+                  <a:schemeClr val="accent5"/>
+                </a:solidFill>
+              </a:rPr>
               <a:t>Extreme Programming (XP) is the most widely used agile process. </a:t>
             </a:r>
           </a:p>
@@ -15364,10 +15569,18 @@
               <a:buNone/>
             </a:pPr>
             <a:r>
-              <a:rPr lang="en-US" dirty="0"/>
+              <a:rPr lang="en-US" dirty="0">
+                <a:highlight>
+                  <a:srgbClr val="FFFF00"/>
+                </a:highlight>
+              </a:rPr>
               <a:t>Plan-driven and agile development</a:t>
             </a:r>
-            <a:endParaRPr dirty="0"/>
+            <a:endParaRPr dirty="0">
+              <a:highlight>
+                <a:srgbClr val="FFFF00"/>
+              </a:highlight>
+            </a:endParaRPr>
           </a:p>
         </p:txBody>
       </p:sp>
@@ -15428,8 +15641,8 @@
         </p:blipFill>
         <p:spPr>
           <a:xfrm>
-            <a:off x="3258751" y="1785249"/>
-            <a:ext cx="5731937" cy="4362054"/>
+            <a:off x="2793249" y="1250278"/>
+            <a:ext cx="5238048" cy="4357443"/>
           </a:xfrm>
           <a:prstGeom prst="rect">
             <a:avLst/>
@@ -15740,7 +15953,7 @@
   <a:extraClrSchemeLst/>
   <a:extLst>
     <a:ext uri="{05A4C25C-085E-4340-85A3-A5531E510DB2}">
-      <thm15:themeFamily xmlns:thm15="http://schemas.microsoft.com/office/thememl/2012/main" xmlns="" name="Office Theme" id="{62F939B6-93AF-4DB8-9C6B-D6C7DFDC589F}" vid="{4A3C46E8-61CC-4603-A589-7422A47A8E4A}"/>
+      <thm15:themeFamily xmlns:thm15="http://schemas.microsoft.com/office/thememl/2012/main" name="Office Theme" id="{62F939B6-93AF-4DB8-9C6B-D6C7DFDC589F}" vid="{4A3C46E8-61CC-4603-A589-7422A47A8E4A}"/>
     </a:ext>
   </a:extLst>
 </a:theme>
